--- a/assets/pptx/catalog-168.pptx
+++ b/assets/pptx/catalog-168.pptx
@@ -3269,7 +3269,7 @@
                 <a:ea typeface="Ebrima"/>
                 <a:cs typeface="Ebrima"/>
               </a:rPr>
-              <a:t>እንዲህ ነው ብዬ የምለውን ምላሽ እስካጣ (2x)</a:t>
+              <a:t>እንዲህ ነው ብዬ የምለውን ምላሽ እስካጣ 2x</a:t>
             </a:r>
           </a:p>
         </p:txBody>
@@ -3354,7 +3354,7 @@
                 <a:ea typeface="Ebrima"/>
                 <a:cs typeface="Ebrima"/>
               </a:rPr>
-              <a:t>ክበር እልሃለሁ መልሼ መልሼ (2x)</a:t>
+              <a:t>ክበር እልሃለሁ መልሼ መልሼ 2x</a:t>
             </a:r>
           </a:p>
         </p:txBody>
@@ -3421,7 +3421,7 @@
                 <a:ea typeface="Ebrima"/>
                 <a:cs typeface="Ebrima"/>
               </a:rPr>
-              <a:t>ኦ ድንቅ ነህ ኦ (2x)</a:t>
+              <a:t>ኦ ድንቅ ነህ ኦ 2x</a:t>
             </a:r>
           </a:p>
           <a:p>
@@ -3439,7 +3439,7 @@
                 <a:ea typeface="Ebrima"/>
                 <a:cs typeface="Ebrima"/>
               </a:rPr>
-              <a:t>ኦ ልዩ ነህ ኦ (2x)</a:t>
+              <a:t>ኦ ልዩ ነህ ኦ 2x</a:t>
             </a:r>
           </a:p>
         </p:txBody>
@@ -3524,7 +3524,7 @@
                 <a:ea typeface="Ebrima"/>
                 <a:cs typeface="Ebrima"/>
               </a:rPr>
-              <a:t>አየሁት ጌትነትህን ሁሉን ማድረግ መቻልህን (2x)</a:t>
+              <a:t>አየሁት ጌትነትህን ሁሉን ማድረግ መቻልህን 2x</a:t>
             </a:r>
           </a:p>
         </p:txBody>
@@ -3591,7 +3591,7 @@
                 <a:ea typeface="Ebrima"/>
                 <a:cs typeface="Ebrima"/>
               </a:rPr>
-              <a:t>ኦ ድንቅ ነህ ኦ (2x)</a:t>
+              <a:t>ኦ ድንቅ ነህ ኦ 2x</a:t>
             </a:r>
           </a:p>
           <a:p>
@@ -3609,7 +3609,7 @@
                 <a:ea typeface="Ebrima"/>
                 <a:cs typeface="Ebrima"/>
               </a:rPr>
-              <a:t>ኦ ልዩ ነህ ኦ (2x)</a:t>
+              <a:t>ኦ ልዩ ነህ ኦ 2x</a:t>
             </a:r>
           </a:p>
         </p:txBody>
@@ -3694,7 +3694,7 @@
                 <a:ea typeface="Ebrima"/>
                 <a:cs typeface="Ebrima"/>
               </a:rPr>
-              <a:t>ክበር እልሃለሁ መልሼ መላልሼ (2x)</a:t>
+              <a:t>ክበር እልሃለሁ መልሼ መላልሼ 2x</a:t>
             </a:r>
           </a:p>
         </p:txBody>
@@ -3761,7 +3761,7 @@
                 <a:ea typeface="Ebrima"/>
                 <a:cs typeface="Ebrima"/>
               </a:rPr>
-              <a:t>ኦ ድንቅ ነህ ኦ (2x)</a:t>
+              <a:t>ኦ ድንቅ ነህ ኦ 2x</a:t>
             </a:r>
           </a:p>
           <a:p>
@@ -3779,7 +3779,7 @@
                 <a:ea typeface="Ebrima"/>
                 <a:cs typeface="Ebrima"/>
               </a:rPr>
-              <a:t>ኦ ልዩ ነህ ኦ (2x)</a:t>
+              <a:t>ኦ ልዩ ነህ ኦ 2x</a:t>
             </a:r>
           </a:p>
         </p:txBody>
@@ -3864,7 +3864,7 @@
                 <a:ea typeface="Ebrima"/>
                 <a:cs typeface="Ebrima"/>
               </a:rPr>
-              <a:t>አሰራር አደራረግህ እራሱም ያንተ ማንነት (2x)</a:t>
+              <a:t>አሰራር አደራረግህ እራሱም ያንተ ማንነት 2x</a:t>
             </a:r>
           </a:p>
         </p:txBody>
@@ -3931,7 +3931,7 @@
                 <a:ea typeface="Ebrima"/>
                 <a:cs typeface="Ebrima"/>
               </a:rPr>
-              <a:t>ኦ ድንቅ ነህ ኦ (2x)</a:t>
+              <a:t>ኦ ድንቅ ነህ ኦ 2x</a:t>
             </a:r>
           </a:p>
           <a:p>
@@ -3949,7 +3949,7 @@
                 <a:ea typeface="Ebrima"/>
                 <a:cs typeface="Ebrima"/>
               </a:rPr>
-              <a:t>ኦ ልዩ ነህ ኦ (2x)</a:t>
+              <a:t>ኦ ልዩ ነህ ኦ 2x</a:t>
             </a:r>
           </a:p>
         </p:txBody>
@@ -4034,7 +4034,7 @@
                 <a:ea typeface="Ebrima"/>
                 <a:cs typeface="Ebrima"/>
               </a:rPr>
-              <a:t>ክበር እልሃለሁ መልሼ መላልሼ (2x)</a:t>
+              <a:t>ክበር እልሃለሁ መልሼ መላልሼ 2x</a:t>
             </a:r>
           </a:p>
         </p:txBody>
@@ -4101,7 +4101,7 @@
                 <a:ea typeface="Ebrima"/>
                 <a:cs typeface="Ebrima"/>
               </a:rPr>
-              <a:t>ኦ ድንቅ ነህ ኦ (2x)</a:t>
+              <a:t>ኦ ድንቅ ነህ ኦ 2x</a:t>
             </a:r>
           </a:p>
           <a:p>
@@ -4119,7 +4119,7 @@
                 <a:ea typeface="Ebrima"/>
                 <a:cs typeface="Ebrima"/>
               </a:rPr>
-              <a:t>ኦ ልዩ ነህ ኦ (2x)</a:t>
+              <a:t>ኦ ልዩ ነህ ኦ 2x</a:t>
             </a:r>
           </a:p>
         </p:txBody>
